--- a/Unidad 1/Act 1.2 Reporte practica_CynthiaMorales_6ISC.pptx
+++ b/Unidad 1/Act 1.2 Reporte practica_CynthiaMorales_6ISC.pptx
@@ -3219,9 +3219,39 @@
 <p:sldMaster xmlns:a="http://schemas.openxmlformats.org/drawingml/2006/main" xmlns:r="http://schemas.openxmlformats.org/officeDocument/2006/relationships" xmlns:p="http://schemas.openxmlformats.org/presentationml/2006/main">
   <p:cSld>
     <p:bg>
-      <p:bgRef idx="1001">
-        <a:schemeClr val="bg1"/>
-      </p:bgRef>
+      <p:bgPr>
+        <a:gradFill flip="none" rotWithShape="1">
+          <a:gsLst>
+            <a:gs pos="0">
+              <a:schemeClr val="accent3">
+                <a:lumMod val="5000"/>
+                <a:lumOff val="95000"/>
+              </a:schemeClr>
+            </a:gs>
+            <a:gs pos="74000">
+              <a:schemeClr val="accent3">
+                <a:lumMod val="45000"/>
+                <a:lumOff val="55000"/>
+              </a:schemeClr>
+            </a:gs>
+            <a:gs pos="83000">
+              <a:schemeClr val="accent3">
+                <a:lumMod val="45000"/>
+                <a:lumOff val="55000"/>
+              </a:schemeClr>
+            </a:gs>
+            <a:gs pos="100000">
+              <a:schemeClr val="accent3">
+                <a:lumMod val="30000"/>
+                <a:lumOff val="70000"/>
+              </a:schemeClr>
+            </a:gs>
+          </a:gsLst>
+          <a:lin ang="5400000" scaled="1"/>
+          <a:tileRect/>
+        </a:gradFill>
+        <a:effectLst/>
+      </p:bgPr>
     </p:bg>
     <p:spTree>
       <p:nvGrpSpPr>
@@ -5881,30 +5911,26 @@
         </p:nvSpPr>
         <p:spPr>
           <a:xfrm>
-            <a:off x="838200" y="1825625"/>
-            <a:ext cx="10515600" cy="2187575"/>
+            <a:off x="977900" y="3167727"/>
+            <a:ext cx="10515600" cy="954107"/>
           </a:xfrm>
         </p:spPr>
         <p:txBody>
-          <a:bodyPr/>
-          <a:lstStyle/>
-          <a:p>
-            <a:r>
-              <a:rPr lang="es-MX" dirty="0"/>
-              <a:t>ARCHIVO DEL REPORTE</a:t>
-            </a:r>
-          </a:p>
-          <a:p>
-            <a:endParaRPr lang="es-MX" dirty="0"/>
-          </a:p>
-          <a:p>
-            <a:r>
-              <a:rPr lang="es-MX" dirty="0"/>
+          <a:bodyPr>
+            <a:noAutofit/>
+          </a:bodyPr>
+          <a:lstStyle/>
+          <a:p>
+            <a:pPr marL="0" indent="0">
+              <a:buNone/>
+            </a:pPr>
+            <a:r>
+              <a:rPr lang="es-MX" sz="3200" dirty="0"/>
               <a:t>ARCHIVO DE LA BASE DE DATOS PRUEBA1</a:t>
             </a:r>
           </a:p>
           <a:p>
-            <a:endParaRPr lang="es-MX" dirty="0"/>
+            <a:endParaRPr lang="es-MX" sz="3200" dirty="0"/>
           </a:p>
         </p:txBody>
       </p:sp>
@@ -5923,7 +5949,7 @@
         </p:nvSpPr>
         <p:spPr>
           <a:xfrm>
-            <a:off x="977900" y="3474134"/>
+            <a:off x="977900" y="4121834"/>
             <a:ext cx="10668000" cy="954107"/>
           </a:xfrm>
           <a:prstGeom prst="rect">
@@ -5940,6 +5966,42 @@
             <a:r>
               <a:rPr lang="es-MX" sz="2800" dirty="0"/>
               <a:t>https://github.com/Cynthia21Morales/FBD_CynthiaJasmineMT/blob/main/Unidad%201/Prueba1</a:t>
+            </a:r>
+          </a:p>
+        </p:txBody>
+      </p:sp>
+      <p:sp>
+        <p:nvSpPr>
+          <p:cNvPr id="7" name="CuadroTexto 6">
+            <a:hlinkClick r:id="rId3"/>
+            <a:extLst>
+              <a:ext uri="{FF2B5EF4-FFF2-40B4-BE49-F238E27FC236}">
+                <a16:creationId xmlns:a16="http://schemas.microsoft.com/office/drawing/2014/main" id="{093C8B13-BCC6-2045-37D3-8DC47C269472}"/>
+              </a:ext>
+            </a:extLst>
+          </p:cNvPr>
+          <p:cNvSpPr txBox="1"/>
+          <p:nvPr/>
+        </p:nvSpPr>
+        <p:spPr>
+          <a:xfrm>
+            <a:off x="977900" y="1890454"/>
+            <a:ext cx="10299700" cy="830997"/>
+          </a:xfrm>
+          <a:prstGeom prst="rect">
+            <a:avLst/>
+          </a:prstGeom>
+          <a:noFill/>
+        </p:spPr>
+        <p:txBody>
+          <a:bodyPr wrap="square">
+            <a:spAutoFit/>
+          </a:bodyPr>
+          <a:lstStyle/>
+          <a:p>
+            <a:r>
+              <a:rPr lang="es-MX" sz="2400" dirty="0"/>
+              <a:t>https://github.com/Cynthia21Morales/FBD_CynthiaJasmineMT/blob/main/Unidad%201/Act%201.2%20Reporte%20practica_CynthiaMorales_6ISC.pptx</a:t>
             </a:r>
           </a:p>
         </p:txBody>
